--- a/Slides/JavaScript/12 - Objects and JSON.pptx
+++ b/Slides/JavaScript/12 - Objects and JSON.pptx
@@ -5,10 +5,10 @@
     <p:sldMasterId id="2147483648" r:id="rId4"/>
   </p:sldMasterIdLst>
   <p:notesMasterIdLst>
-    <p:notesMasterId r:id="rId19"/>
+    <p:notesMasterId r:id="rId20"/>
   </p:notesMasterIdLst>
   <p:handoutMasterIdLst>
-    <p:handoutMasterId r:id="rId20"/>
+    <p:handoutMasterId r:id="rId21"/>
   </p:handoutMasterIdLst>
   <p:sldIdLst>
     <p:sldId id="263" r:id="rId5"/>
@@ -23,13 +23,14 @@
     <p:sldId id="537" r:id="rId14"/>
     <p:sldId id="544" r:id="rId15"/>
     <p:sldId id="541" r:id="rId16"/>
-    <p:sldId id="494" r:id="rId17"/>
-    <p:sldId id="535" r:id="rId18"/>
+    <p:sldId id="908" r:id="rId17"/>
+    <p:sldId id="494" r:id="rId18"/>
+    <p:sldId id="535" r:id="rId19"/>
   </p:sldIdLst>
   <p:sldSz cx="12192000" cy="6858000"/>
   <p:notesSz cx="6645275" cy="9775825"/>
   <p:custDataLst>
-    <p:tags r:id="rId21"/>
+    <p:tags r:id="rId22"/>
   </p:custDataLst>
   <p:defaultTextStyle>
     <a:defPPr>
@@ -250,7 +251,7 @@
             <a:fld id="{86D088FE-3E68-47FE-8BA4-634CD34BABBC}" type="datetimeFigureOut">
               <a:rPr lang="en-GB" smtClean="0"/>
               <a:pPr/>
-              <a:t>07/02/2024</a:t>
+              <a:t>20/05/2026</a:t>
             </a:fld>
             <a:endParaRPr lang="en-GB"/>
           </a:p>
@@ -422,7 +423,7 @@
             <a:fld id="{1D6B66C6-1E92-0F4E-A300-9D4ED1F0C23F}" type="datetimeFigureOut">
               <a:rPr lang="en-GB" smtClean="0"/>
               <a:pPr/>
-              <a:t>07/02/2024</a:t>
+              <a:t>20/05/2026</a:t>
             </a:fld>
             <a:endParaRPr lang="en-GB"/>
           </a:p>
@@ -1110,7 +1111,12 @@
             <p:ph type="sldImg"/>
           </p:nvPr>
         </p:nvSpPr>
-        <p:spPr/>
+        <p:spPr>
+          <a:xfrm>
+            <a:off x="571500" y="581025"/>
+            <a:ext cx="5715000" cy="3216275"/>
+          </a:xfrm>
+        </p:spPr>
       </p:sp>
       <p:sp>
         <p:nvSpPr>
@@ -1127,7 +1133,7 @@
           <a:bodyPr/>
           <a:lstStyle/>
           <a:p>
-            <a:endParaRPr lang="en-IN"/>
+            <a:endParaRPr lang="en-GB" dirty="0"/>
           </a:p>
         </p:txBody>
       </p:sp>
@@ -1146,19 +1152,28 @@
           <a:bodyPr/>
           <a:lstStyle/>
           <a:p>
-            <a:fld id="{548901C6-1DA1-FB44-ABEE-06A0FEB7738E}" type="slidenum">
-              <a:rPr lang="en-GB" smtClean="0"/>
-              <a:pPr/>
+            <a:pPr>
+              <a:defRPr/>
+            </a:pPr>
+            <a:r>
+              <a:rPr lang="en-GB"/>
+              <a:t>CONTINUED </a:t>
+            </a:r>
+            <a:fld id="{993982D2-741D-4BC6-8F8E-84F7C8891268}" type="slidenum">
+              <a:rPr smtClean="0"/>
+              <a:pPr>
+                <a:defRPr/>
+              </a:pPr>
               <a:t>13</a:t>
             </a:fld>
-            <a:endParaRPr lang="en-GB"/>
+            <a:endParaRPr dirty="0"/>
           </a:p>
         </p:txBody>
       </p:sp>
     </p:spTree>
     <p:extLst>
       <p:ext uri="{BB962C8B-B14F-4D97-AF65-F5344CB8AC3E}">
-        <p14:creationId xmlns:p14="http://schemas.microsoft.com/office/powerpoint/2010/main" val="2525854372"/>
+        <p14:creationId xmlns:p14="http://schemas.microsoft.com/office/powerpoint/2010/main" val="1507364224"/>
       </p:ext>
     </p:extLst>
   </p:cSld>
@@ -1235,6 +1250,91 @@
               <a:rPr lang="en-GB" smtClean="0"/>
               <a:pPr/>
               <a:t>14</a:t>
+            </a:fld>
+            <a:endParaRPr lang="en-GB"/>
+          </a:p>
+        </p:txBody>
+      </p:sp>
+    </p:spTree>
+    <p:extLst>
+      <p:ext uri="{BB962C8B-B14F-4D97-AF65-F5344CB8AC3E}">
+        <p14:creationId xmlns:p14="http://schemas.microsoft.com/office/powerpoint/2010/main" val="2525854372"/>
+      </p:ext>
+    </p:extLst>
+  </p:cSld>
+  <p:clrMapOvr>
+    <a:masterClrMapping/>
+  </p:clrMapOvr>
+</p:notes>
+</file>
+
+<file path=ppt/notesSlides/notesSlide15.xml><?xml version="1.0" encoding="utf-8"?>
+<p:notes xmlns:a="http://schemas.openxmlformats.org/drawingml/2006/main" xmlns:r="http://schemas.openxmlformats.org/officeDocument/2006/relationships" xmlns:p="http://schemas.openxmlformats.org/presentationml/2006/main">
+  <p:cSld>
+    <p:spTree>
+      <p:nvGrpSpPr>
+        <p:cNvPr id="1" name=""/>
+        <p:cNvGrpSpPr/>
+        <p:nvPr/>
+      </p:nvGrpSpPr>
+      <p:grpSpPr>
+        <a:xfrm>
+          <a:off x="0" y="0"/>
+          <a:ext cx="0" cy="0"/>
+          <a:chOff x="0" y="0"/>
+          <a:chExt cx="0" cy="0"/>
+        </a:xfrm>
+      </p:grpSpPr>
+      <p:sp>
+        <p:nvSpPr>
+          <p:cNvPr id="2" name="Slide Image Placeholder 1"/>
+          <p:cNvSpPr>
+            <a:spLocks noGrp="1" noRot="1" noChangeAspect="1"/>
+          </p:cNvSpPr>
+          <p:nvPr>
+            <p:ph type="sldImg"/>
+          </p:nvPr>
+        </p:nvSpPr>
+        <p:spPr/>
+      </p:sp>
+      <p:sp>
+        <p:nvSpPr>
+          <p:cNvPr id="3" name="Notes Placeholder 2"/>
+          <p:cNvSpPr>
+            <a:spLocks noGrp="1"/>
+          </p:cNvSpPr>
+          <p:nvPr>
+            <p:ph type="body" idx="1"/>
+          </p:nvPr>
+        </p:nvSpPr>
+        <p:spPr/>
+        <p:txBody>
+          <a:bodyPr/>
+          <a:lstStyle/>
+          <a:p>
+            <a:endParaRPr lang="en-IN"/>
+          </a:p>
+        </p:txBody>
+      </p:sp>
+      <p:sp>
+        <p:nvSpPr>
+          <p:cNvPr id="4" name="Slide Number Placeholder 3"/>
+          <p:cNvSpPr>
+            <a:spLocks noGrp="1"/>
+          </p:cNvSpPr>
+          <p:nvPr>
+            <p:ph type="sldNum" sz="quarter" idx="5"/>
+          </p:nvPr>
+        </p:nvSpPr>
+        <p:spPr/>
+        <p:txBody>
+          <a:bodyPr/>
+          <a:lstStyle/>
+          <a:p>
+            <a:fld id="{548901C6-1DA1-FB44-ABEE-06A0FEB7738E}" type="slidenum">
+              <a:rPr lang="en-GB" smtClean="0"/>
+              <a:pPr/>
+              <a:t>15</a:t>
             </a:fld>
             <a:endParaRPr lang="en-GB"/>
           </a:p>
@@ -2049,13 +2149,13 @@
           <p:nvPr userDrawn="1"/>
         </p:nvPicPr>
         <p:blipFill>
-          <a:blip r:embed="rId3">
+          <a:blip>
             <a:extLst>
               <a:ext uri="{28A0092B-C50C-407E-A947-70E740481C1C}">
                 <a14:useLocalDpi xmlns:a14="http://schemas.microsoft.com/office/drawing/2010/main" val="0"/>
               </a:ext>
               <a:ext uri="{96DAC541-7B7A-43D3-8B79-37D633B846F1}">
-                <asvg:svgBlip xmlns:asvg="http://schemas.microsoft.com/office/drawing/2016/SVG/main" r:embed="rId4"/>
+                <asvg:svgBlip xmlns:asvg="http://schemas.microsoft.com/office/drawing/2016/SVG/main" r:embed="rId3"/>
               </a:ext>
             </a:extLst>
           </a:blip>
@@ -10436,13 +10536,13 @@
           <p:nvPr userDrawn="1"/>
         </p:nvPicPr>
         <p:blipFill>
-          <a:blip r:embed="rId3">
+          <a:blip>
             <a:extLst>
               <a:ext uri="{28A0092B-C50C-407E-A947-70E740481C1C}">
                 <a14:useLocalDpi xmlns:a14="http://schemas.microsoft.com/office/drawing/2010/main" val="0"/>
               </a:ext>
               <a:ext uri="{96DAC541-7B7A-43D3-8B79-37D633B846F1}">
-                <asvg:svgBlip xmlns:asvg="http://schemas.microsoft.com/office/drawing/2016/SVG/main" r:embed="rId4"/>
+                <asvg:svgBlip xmlns:asvg="http://schemas.microsoft.com/office/drawing/2016/SVG/main" r:embed="rId3"/>
               </a:ext>
             </a:extLst>
           </a:blip>
@@ -17613,13 +17713,13 @@
           <p:nvPr userDrawn="1"/>
         </p:nvPicPr>
         <p:blipFill>
-          <a:blip r:embed="rId3">
+          <a:blip>
             <a:extLst>
               <a:ext uri="{28A0092B-C50C-407E-A947-70E740481C1C}">
                 <a14:useLocalDpi xmlns:a14="http://schemas.microsoft.com/office/drawing/2010/main" val="0"/>
               </a:ext>
               <a:ext uri="{96DAC541-7B7A-43D3-8B79-37D633B846F1}">
-                <asvg:svgBlip xmlns:asvg="http://schemas.microsoft.com/office/drawing/2016/SVG/main" r:embed="rId4"/>
+                <asvg:svgBlip xmlns:asvg="http://schemas.microsoft.com/office/drawing/2016/SVG/main" r:embed="rId3"/>
               </a:ext>
             </a:extLst>
           </a:blip>
@@ -20240,13 +20340,13 @@
           <p:nvPr userDrawn="1"/>
         </p:nvPicPr>
         <p:blipFill>
-          <a:blip r:embed="rId3">
+          <a:blip>
             <a:extLst>
               <a:ext uri="{28A0092B-C50C-407E-A947-70E740481C1C}">
                 <a14:useLocalDpi xmlns:a14="http://schemas.microsoft.com/office/drawing/2010/main" val="0"/>
               </a:ext>
               <a:ext uri="{96DAC541-7B7A-43D3-8B79-37D633B846F1}">
-                <asvg:svgBlip xmlns:asvg="http://schemas.microsoft.com/office/drawing/2016/SVG/main" r:embed="rId4"/>
+                <asvg:svgBlip xmlns:asvg="http://schemas.microsoft.com/office/drawing/2016/SVG/main" r:embed="rId3"/>
               </a:ext>
             </a:extLst>
           </a:blip>
@@ -21947,13 +22047,13 @@
           <p:nvPr userDrawn="1"/>
         </p:nvPicPr>
         <p:blipFill>
-          <a:blip r:embed="rId3">
+          <a:blip>
             <a:extLst>
               <a:ext uri="{28A0092B-C50C-407E-A947-70E740481C1C}">
                 <a14:useLocalDpi xmlns:a14="http://schemas.microsoft.com/office/drawing/2010/main" val="0"/>
               </a:ext>
               <a:ext uri="{96DAC541-7B7A-43D3-8B79-37D633B846F1}">
-                <asvg:svgBlip xmlns:asvg="http://schemas.microsoft.com/office/drawing/2016/SVG/main" r:embed="rId4"/>
+                <asvg:svgBlip xmlns:asvg="http://schemas.microsoft.com/office/drawing/2016/SVG/main" r:embed="rId3"/>
               </a:ext>
             </a:extLst>
           </a:blip>
@@ -28651,6 +28751,420 @@
       </p:grpSpPr>
       <p:sp>
         <p:nvSpPr>
+          <p:cNvPr id="4" name="Title 3">
+            <a:extLst>
+              <a:ext uri="{FF2B5EF4-FFF2-40B4-BE49-F238E27FC236}">
+                <a16:creationId xmlns:a16="http://schemas.microsoft.com/office/drawing/2014/main" id="{B6F948DE-9BA4-4416-B213-36446EDA8F67}"/>
+              </a:ext>
+            </a:extLst>
+          </p:cNvPr>
+          <p:cNvSpPr>
+            <a:spLocks noGrp="1"/>
+          </p:cNvSpPr>
+          <p:nvPr>
+            <p:ph type="title"/>
+          </p:nvPr>
+        </p:nvSpPr>
+        <p:spPr/>
+        <p:txBody>
+          <a:bodyPr/>
+          <a:lstStyle/>
+          <a:p>
+            <a:r>
+              <a:rPr lang="en-GB" dirty="0"/>
+              <a:t>Using Ajax</a:t>
+            </a:r>
+          </a:p>
+        </p:txBody>
+      </p:sp>
+      <p:sp>
+        <p:nvSpPr>
+          <p:cNvPr id="3" name="Content Placeholder 2">
+            <a:extLst>
+              <a:ext uri="{FF2B5EF4-FFF2-40B4-BE49-F238E27FC236}">
+                <a16:creationId xmlns:a16="http://schemas.microsoft.com/office/drawing/2014/main" id="{7EE23549-8E19-40A1-A106-9740BFD0462C}"/>
+              </a:ext>
+            </a:extLst>
+          </p:cNvPr>
+          <p:cNvSpPr>
+            <a:spLocks noGrp="1"/>
+          </p:cNvSpPr>
+          <p:nvPr>
+            <p:ph idx="1"/>
+          </p:nvPr>
+        </p:nvSpPr>
+        <p:spPr/>
+        <p:txBody>
+          <a:bodyPr/>
+          <a:lstStyle/>
+          <a:p>
+            <a:pPr marL="0" marR="0">
+              <a:spcBef>
+                <a:spcPts val="0"/>
+              </a:spcBef>
+              <a:spcAft>
+                <a:spcPts val="0"/>
+              </a:spcAft>
+            </a:pPr>
+            <a:endParaRPr lang="en-GB" b="1" dirty="0">
+              <a:solidFill>
+                <a:srgbClr val="0070C0"/>
+              </a:solidFill>
+              <a:effectLst/>
+              <a:latin typeface="Calibri" panose="020F0502020204030204" pitchFamily="34" charset="0"/>
+            </a:endParaRPr>
+          </a:p>
+          <a:p>
+            <a:pPr>
+              <a:spcAft>
+                <a:spcPts val="0"/>
+              </a:spcAft>
+            </a:pPr>
+            <a:r>
+              <a:rPr lang="en-GB" b="1" dirty="0">
+                <a:latin typeface="Calibri" panose="020F0502020204030204" pitchFamily="34" charset="0"/>
+              </a:rPr>
+              <a:t> </a:t>
+            </a:r>
+            <a:r>
+              <a:rPr lang="en-GB" b="1" dirty="0"/>
+              <a:t>Is a way for a web page to get or send data in the background so it can update part of the page without reloading everything. Using Fetch and Promise to get/update data</a:t>
+            </a:r>
+          </a:p>
+          <a:p>
+            <a:pPr marL="0" marR="0">
+              <a:spcBef>
+                <a:spcPts val="0"/>
+              </a:spcBef>
+              <a:spcAft>
+                <a:spcPts val="0"/>
+              </a:spcAft>
+            </a:pPr>
+            <a:endParaRPr lang="en-GB" dirty="0">
+              <a:effectLst/>
+              <a:latin typeface="Calibri" panose="020F0502020204030204" pitchFamily="34" charset="0"/>
+            </a:endParaRPr>
+          </a:p>
+        </p:txBody>
+      </p:sp>
+      <p:sp>
+        <p:nvSpPr>
+          <p:cNvPr id="5" name="TextBox 4">
+            <a:extLst>
+              <a:ext uri="{FF2B5EF4-FFF2-40B4-BE49-F238E27FC236}">
+                <a16:creationId xmlns:a16="http://schemas.microsoft.com/office/drawing/2014/main" id="{5075BF66-ED54-4111-86B0-82352EE79CB7}"/>
+              </a:ext>
+            </a:extLst>
+          </p:cNvPr>
+          <p:cNvSpPr txBox="1"/>
+          <p:nvPr/>
+        </p:nvSpPr>
+        <p:spPr>
+          <a:xfrm>
+            <a:off x="486282" y="2418619"/>
+            <a:ext cx="7680713" cy="2854628"/>
+          </a:xfrm>
+          <a:prstGeom prst="rect">
+            <a:avLst/>
+          </a:prstGeom>
+          <a:solidFill>
+            <a:schemeClr val="bg1">
+              <a:lumMod val="95000"/>
+            </a:schemeClr>
+          </a:solidFill>
+          <a:ln>
+            <a:solidFill>
+              <a:schemeClr val="bg1">
+                <a:lumMod val="95000"/>
+              </a:schemeClr>
+            </a:solidFill>
+          </a:ln>
+          <a:effectLst>
+            <a:outerShdw blurRad="50800" dist="38100" dir="5400000" algn="t" rotWithShape="0">
+              <a:prstClr val="black">
+                <a:alpha val="40000"/>
+              </a:prstClr>
+            </a:outerShdw>
+          </a:effectLst>
+        </p:spPr>
+        <p:style>
+          <a:lnRef idx="2">
+            <a:schemeClr val="dk1"/>
+          </a:lnRef>
+          <a:fillRef idx="1">
+            <a:schemeClr val="lt1"/>
+          </a:fillRef>
+          <a:effectRef idx="0">
+            <a:schemeClr val="dk1"/>
+          </a:effectRef>
+          <a:fontRef idx="minor">
+            <a:schemeClr val="dk1"/>
+          </a:fontRef>
+        </p:style>
+        <p:txBody>
+          <a:bodyPr wrap="square">
+            <a:spAutoFit/>
+          </a:bodyPr>
+          <a:lstStyle/>
+          <a:p>
+            <a:endParaRPr lang="en-GB" b="1" dirty="0">
+              <a:solidFill>
+                <a:srgbClr val="000000"/>
+              </a:solidFill>
+              <a:latin typeface="Consolas" panose="020B0609020204030204" pitchFamily="49" charset="0"/>
+            </a:endParaRPr>
+          </a:p>
+          <a:p>
+            <a:r>
+              <a:rPr lang="en-GB" b="1" dirty="0">
+                <a:solidFill>
+                  <a:srgbClr val="000000"/>
+                </a:solidFill>
+                <a:latin typeface="Consolas" panose="020B0609020204030204" pitchFamily="49" charset="0"/>
+              </a:rPr>
+              <a:t>   fetch(</a:t>
+            </a:r>
+            <a:r>
+              <a:rPr lang="en-GB" b="1" dirty="0">
+                <a:solidFill>
+                  <a:srgbClr val="A31515"/>
+                </a:solidFill>
+                <a:latin typeface="Consolas" panose="020B0609020204030204" pitchFamily="49" charset="0"/>
+              </a:rPr>
+              <a:t>'https://tx100.onrender.com/customers'</a:t>
+            </a:r>
+            <a:r>
+              <a:rPr lang="en-GB" b="1" dirty="0">
+                <a:solidFill>
+                  <a:srgbClr val="000000"/>
+                </a:solidFill>
+                <a:latin typeface="Consolas" panose="020B0609020204030204" pitchFamily="49" charset="0"/>
+              </a:rPr>
+              <a:t>)</a:t>
+            </a:r>
+          </a:p>
+          <a:p>
+            <a:endParaRPr lang="en-GB" sz="1050" b="1" dirty="0">
+              <a:solidFill>
+                <a:srgbClr val="000000"/>
+              </a:solidFill>
+              <a:latin typeface="Consolas" panose="020B0609020204030204" pitchFamily="49" charset="0"/>
+            </a:endParaRPr>
+          </a:p>
+          <a:p>
+            <a:r>
+              <a:rPr lang="en-GB" b="1" dirty="0">
+                <a:solidFill>
+                  <a:srgbClr val="000000"/>
+                </a:solidFill>
+                <a:latin typeface="Consolas" panose="020B0609020204030204" pitchFamily="49" charset="0"/>
+              </a:rPr>
+              <a:t>        .then(res =&gt; {</a:t>
+            </a:r>
+          </a:p>
+          <a:p>
+            <a:r>
+              <a:rPr lang="en-GB" b="1" dirty="0">
+                <a:solidFill>
+                  <a:srgbClr val="000000"/>
+                </a:solidFill>
+                <a:latin typeface="Consolas" panose="020B0609020204030204" pitchFamily="49" charset="0"/>
+              </a:rPr>
+              <a:t>            </a:t>
+            </a:r>
+            <a:r>
+              <a:rPr lang="en-GB" b="1" dirty="0">
+                <a:solidFill>
+                  <a:srgbClr val="0000FF"/>
+                </a:solidFill>
+                <a:latin typeface="Consolas" panose="020B0609020204030204" pitchFamily="49" charset="0"/>
+              </a:rPr>
+              <a:t>return</a:t>
+            </a:r>
+            <a:r>
+              <a:rPr lang="en-GB" b="1" dirty="0">
+                <a:solidFill>
+                  <a:srgbClr val="000000"/>
+                </a:solidFill>
+                <a:latin typeface="Consolas" panose="020B0609020204030204" pitchFamily="49" charset="0"/>
+              </a:rPr>
+              <a:t> </a:t>
+            </a:r>
+            <a:r>
+              <a:rPr lang="en-GB" b="1" dirty="0" err="1">
+                <a:solidFill>
+                  <a:srgbClr val="000000"/>
+                </a:solidFill>
+                <a:latin typeface="Consolas" panose="020B0609020204030204" pitchFamily="49" charset="0"/>
+              </a:rPr>
+              <a:t>res.json</a:t>
+            </a:r>
+            <a:r>
+              <a:rPr lang="en-GB" b="1" dirty="0">
+                <a:solidFill>
+                  <a:srgbClr val="000000"/>
+                </a:solidFill>
+                <a:latin typeface="Consolas" panose="020B0609020204030204" pitchFamily="49" charset="0"/>
+              </a:rPr>
+              <a:t>();</a:t>
+            </a:r>
+          </a:p>
+          <a:p>
+            <a:endParaRPr lang="en-GB" sz="1100" b="1" dirty="0">
+              <a:solidFill>
+                <a:srgbClr val="000000"/>
+              </a:solidFill>
+              <a:latin typeface="Consolas" panose="020B0609020204030204" pitchFamily="49" charset="0"/>
+            </a:endParaRPr>
+          </a:p>
+          <a:p>
+            <a:r>
+              <a:rPr lang="en-GB" b="1" dirty="0">
+                <a:solidFill>
+                  <a:srgbClr val="000000"/>
+                </a:solidFill>
+                <a:latin typeface="Consolas" panose="020B0609020204030204" pitchFamily="49" charset="0"/>
+              </a:rPr>
+              <a:t>        }).then(data =&gt; {</a:t>
+            </a:r>
+          </a:p>
+          <a:p>
+            <a:r>
+              <a:rPr lang="en-GB" b="1" dirty="0">
+                <a:solidFill>
+                  <a:srgbClr val="000000"/>
+                </a:solidFill>
+                <a:latin typeface="Consolas" panose="020B0609020204030204" pitchFamily="49" charset="0"/>
+              </a:rPr>
+              <a:t>            </a:t>
+            </a:r>
+            <a:r>
+              <a:rPr lang="en-GB" b="1" dirty="0">
+                <a:solidFill>
+                  <a:srgbClr val="00B050"/>
+                </a:solidFill>
+                <a:latin typeface="Consolas" panose="020B0609020204030204" pitchFamily="49" charset="0"/>
+              </a:rPr>
+              <a:t>// code to display or use data</a:t>
+            </a:r>
+          </a:p>
+          <a:p>
+            <a:endParaRPr lang="en-GB" sz="1200" b="1" dirty="0">
+              <a:solidFill>
+                <a:srgbClr val="000000"/>
+              </a:solidFill>
+              <a:latin typeface="Consolas" panose="020B0609020204030204" pitchFamily="49" charset="0"/>
+            </a:endParaRPr>
+          </a:p>
+          <a:p>
+            <a:r>
+              <a:rPr lang="en-GB" b="1" dirty="0">
+                <a:solidFill>
+                  <a:srgbClr val="000000"/>
+                </a:solidFill>
+                <a:latin typeface="Consolas" panose="020B0609020204030204" pitchFamily="49" charset="0"/>
+              </a:rPr>
+              <a:t>        });</a:t>
+            </a:r>
+          </a:p>
+          <a:p>
+            <a:endParaRPr lang="en-GB" b="1" dirty="0">
+              <a:solidFill>
+                <a:srgbClr val="000000"/>
+              </a:solidFill>
+              <a:latin typeface="Consolas" panose="020B0609020204030204" pitchFamily="49" charset="0"/>
+            </a:endParaRPr>
+          </a:p>
+        </p:txBody>
+      </p:sp>
+      <p:sp>
+        <p:nvSpPr>
+          <p:cNvPr id="7" name="Oval 6">
+            <a:hlinkClick r:id="rId3"/>
+            <a:extLst>
+              <a:ext uri="{FF2B5EF4-FFF2-40B4-BE49-F238E27FC236}">
+                <a16:creationId xmlns:a16="http://schemas.microsoft.com/office/drawing/2014/main" id="{33E5408E-5BD1-7AF9-5A56-6B5DC73EB8ED}"/>
+              </a:ext>
+            </a:extLst>
+          </p:cNvPr>
+          <p:cNvSpPr/>
+          <p:nvPr/>
+        </p:nvSpPr>
+        <p:spPr>
+          <a:xfrm>
+            <a:off x="8779387" y="4760847"/>
+            <a:ext cx="718181" cy="393291"/>
+          </a:xfrm>
+          <a:prstGeom prst="ellipse">
+            <a:avLst/>
+          </a:prstGeom>
+          <a:ln w="28575"/>
+          <a:effectLst>
+            <a:outerShdw blurRad="50800" dist="38100" dir="2700000" algn="tl" rotWithShape="0">
+              <a:prstClr val="black">
+                <a:alpha val="40000"/>
+              </a:prstClr>
+            </a:outerShdw>
+          </a:effectLst>
+        </p:spPr>
+        <p:style>
+          <a:lnRef idx="2">
+            <a:schemeClr val="dk1"/>
+          </a:lnRef>
+          <a:fillRef idx="1">
+            <a:schemeClr val="lt1"/>
+          </a:fillRef>
+          <a:effectRef idx="0">
+            <a:schemeClr val="dk1"/>
+          </a:effectRef>
+          <a:fontRef idx="minor">
+            <a:schemeClr val="dk1"/>
+          </a:fontRef>
+        </p:style>
+        <p:txBody>
+          <a:bodyPr rtlCol="0" anchor="ctr"/>
+          <a:lstStyle/>
+          <a:p>
+            <a:pPr algn="ctr"/>
+            <a:r>
+              <a:rPr lang="en-GB" sz="800" b="1" dirty="0"/>
+              <a:t>Demo</a:t>
+            </a:r>
+          </a:p>
+        </p:txBody>
+      </p:sp>
+    </p:spTree>
+    <p:extLst>
+      <p:ext uri="{BB962C8B-B14F-4D97-AF65-F5344CB8AC3E}">
+        <p14:creationId xmlns:p14="http://schemas.microsoft.com/office/powerpoint/2010/main" val="441027339"/>
+      </p:ext>
+    </p:extLst>
+  </p:cSld>
+  <p:clrMapOvr>
+    <a:masterClrMapping/>
+  </p:clrMapOvr>
+</p:sld>
+</file>
+
+<file path=ppt/slides/slide14.xml><?xml version="1.0" encoding="utf-8"?>
+<p:sld xmlns:a="http://schemas.openxmlformats.org/drawingml/2006/main" xmlns:r="http://schemas.openxmlformats.org/officeDocument/2006/relationships" xmlns:p="http://schemas.openxmlformats.org/presentationml/2006/main">
+  <p:cSld>
+    <p:spTree>
+      <p:nvGrpSpPr>
+        <p:cNvPr id="1" name=""/>
+        <p:cNvGrpSpPr/>
+        <p:nvPr/>
+      </p:nvGrpSpPr>
+      <p:grpSpPr>
+        <a:xfrm>
+          <a:off x="0" y="0"/>
+          <a:ext cx="0" cy="0"/>
+          <a:chOff x="0" y="0"/>
+          <a:chExt cx="0" cy="0"/>
+        </a:xfrm>
+      </p:grpSpPr>
+      <p:sp>
+        <p:nvSpPr>
           <p:cNvPr id="6" name="Text Placeholder 5">
             <a:extLst>
               <a:ext uri="{FF2B5EF4-FFF2-40B4-BE49-F238E27FC236}">
@@ -28744,7 +29258,7 @@
 </p:sld>
 </file>
 
-<file path=ppt/slides/slide14.xml><?xml version="1.0" encoding="utf-8"?>
+<file path=ppt/slides/slide15.xml><?xml version="1.0" encoding="utf-8"?>
 <p:sld xmlns:a="http://schemas.openxmlformats.org/drawingml/2006/main" xmlns:r="http://schemas.openxmlformats.org/officeDocument/2006/relationships" xmlns:p="http://schemas.openxmlformats.org/presentationml/2006/main">
   <p:cSld>
     <p:spTree>
